--- a/catalog/samples/recommendation_pillars.pptx
+++ b/catalog/samples/recommendation_pillars.pptx
@@ -1272,7 +1272,7 @@
           </a:p>
           <a:p>
             <a:r>
-              <a:t>  "template_sha256": "95826a9af84c6455b1d637a9ec39ccddfdd43f6b99bbe0c4e6700a3f02f2f198"</a:t>
+              <a:t>  "template_sha256": "b337f2b0aaea4c6e23ff80dbe0c5f6f71f4d3c54b2655ad26bc018ce3912ee40"</a:t>
             </a:r>
           </a:p>
           <a:p>
